--- a/Slides/Semana 17/semana_17_slides.pptx
+++ b/Slides/Semana 17/semana_17_slides.pptx
@@ -795,7 +795,7 @@
 - "Qual foi o momento mais difícil do projeto, e como a equipe reagiu?"
 - "Como este projeto poderia continuar ou se transformar em um edital, portfólio ou iniciativa própria?"
 Avaliação nesta semana: consolidação final de Reflexão Crítica, Documentação e Trabalho em Equipe; retomada de Execução e Interação com a Comunidade na fala de cada equipe sobre resultados e impacto. Última semana de observação formal da Rubrica de Avaliação.
-Fonte: Plano Semanal Semana 17, Cronograma (Semana 17), CLAUDE.md, COURSE_CONTEXT.md, PEDAGOGICAL_RULES.md, EXTENSION_PROJECT_GUIDE.md, Rubrica_de_Avaliacao.md, Plano Semanal Semana 16 (continuidade).</a:t>
+Fonte: Plano Semanal Semana 17, Cronograma (Semana 17), Rubrica_de_Avaliacao.md, Plano Semanal Semana 16 (continuidade).</a:t>
             </a:r>
             <a:endParaRPr lang="en-US" dirty="0"/>
           </a:p>
